--- a/assets/readings-supper.pptx
+++ b/assets/readings-supper.pptx
@@ -108,6 +108,7 @@
     <p:sldId id="358" r:id="rId102"/>
     <p:sldId id="359" r:id="rId103"/>
     <p:sldId id="360" r:id="rId104"/>
+    <p:sldId id="361" r:id="rId109"/>
   </p:sldIdLst>
   <p:sldSz cx="12192000" cy="6858000"/>
   <p:notesSz cx="6858000" cy="9144000"/>
@@ -2032,6 +2033,134 @@
 </p:sld>
 </file>
 
+<file path=ppt/slides/slide104.xml><?xml version="1.0" encoding="utf-8"?>
+<p:sld xmlns:a="http://schemas.openxmlformats.org/drawingml/2006/main" xmlns:p="http://schemas.openxmlformats.org/presentationml/2006/main" xmlns:r="http://schemas.openxmlformats.org/officeDocument/2006/relationships">
+  <p:cSld>
+    <p:spTree>
+      <p:nvGrpSpPr>
+        <p:cNvPr id="1" name=""/>
+        <p:cNvGrpSpPr/>
+        <p:nvPr/>
+      </p:nvGrpSpPr>
+      <p:grpSpPr/>
+      <p:sp>
+        <p:nvSpPr>
+          <p:cNvPr id="4" name="Text Placeholder 3">
+            <a:extLst>
+              <a:ext uri="{FF2B5EF4-FFF2-40B4-BE49-F238E27FC236}">
+                <a16:creationId xmlns:a16="http://schemas.microsoft.com/office/drawing/2014/main" id="{DFD9D55F-EF00-CB99-E3DF-A541273F03E7}"/>
+              </a:ext>
+            </a:extLst>
+          </p:cNvPr>
+          <p:cNvSpPr>
+            <a:spLocks noGrp="1"/>
+          </p:cNvSpPr>
+          <p:nvPr>
+            <p:ph type="body" sz="quarter" idx="10"/>
+          </p:nvPr>
+        </p:nvSpPr>
+        <p:spPr/>
+        <p:txBody>
+          <a:bodyPr/>
+          <a:lstStyle/>
+          <a:p>
+            <a:r>
+              <a:t>1 Corinthians 11:27-29</a:t>
+            </a:r>
+          </a:p>
+        </p:txBody>
+      </p:sp>
+      <p:sp>
+        <p:nvSpPr>
+          <p:cNvPr id="5" name="Text Placeholder 4">
+            <a:extLst>
+              <a:ext uri="{FF2B5EF4-FFF2-40B4-BE49-F238E27FC236}">
+                <a16:creationId xmlns:a16="http://schemas.microsoft.com/office/drawing/2014/main" id="{183C6CE0-2BF5-9A80-AAF9-98602288B00B}"/>
+              </a:ext>
+            </a:extLst>
+          </p:cNvPr>
+          <p:cNvSpPr>
+            <a:spLocks noGrp="1"/>
+          </p:cNvSpPr>
+          <p:nvPr>
+            <p:ph type="body" sz="quarter" idx="11"/>
+          </p:nvPr>
+        </p:nvSpPr>
+        <p:spPr/>
+        <p:txBody>
+          <a:bodyPr/>
+          <a:lstStyle/>
+          <a:p>
+            <a:r>
+              <a:t>1 Corintios 11:27-29</a:t>
+            </a:r>
+          </a:p>
+        </p:txBody>
+      </p:sp>
+      <p:sp>
+        <p:nvSpPr>
+          <p:cNvPr id="6" name="Text Placeholder 5">
+            <a:extLst>
+              <a:ext uri="{FF2B5EF4-FFF2-40B4-BE49-F238E27FC236}">
+                <a16:creationId xmlns:a16="http://schemas.microsoft.com/office/drawing/2014/main" id="{E3687956-5B1E-E87A-C63F-2CF83852F74A}"/>
+              </a:ext>
+            </a:extLst>
+          </p:cNvPr>
+          <p:cNvSpPr>
+            <a:spLocks noGrp="1"/>
+          </p:cNvSpPr>
+          <p:nvPr>
+            <p:ph type="body" sz="quarter" idx="12"/>
+          </p:nvPr>
+        </p:nvSpPr>
+        <p:spPr/>
+        <p:txBody>
+          <a:bodyPr/>
+          <a:lstStyle/>
+          <a:p>
+            <a:r>
+              <a:rPr sz="1800"/>
+              <a:t>Therefore whoever eats the bread or drinks the cup of the Lord in an unworthy manner, shall be guilty of the body and the blood of the Lord. But a man must examine himself, and in so doing he is to eat of the bread and drink of the cup. For he who eats and drinks, eats and drinks judgment to himself if he does not judge the body rightly.</a:t>
+            </a:r>
+          </a:p>
+        </p:txBody>
+      </p:sp>
+      <p:sp>
+        <p:nvSpPr>
+          <p:cNvPr id="7" name="Text Placeholder 6">
+            <a:extLst>
+              <a:ext uri="{FF2B5EF4-FFF2-40B4-BE49-F238E27FC236}">
+                <a16:creationId xmlns:a16="http://schemas.microsoft.com/office/drawing/2014/main" id="{939E2508-EFDC-0849-203A-1E6D24D54960}"/>
+              </a:ext>
+            </a:extLst>
+          </p:cNvPr>
+          <p:cNvSpPr>
+            <a:spLocks noGrp="1"/>
+          </p:cNvSpPr>
+          <p:nvPr>
+            <p:ph type="body" sz="quarter" idx="13"/>
+          </p:nvPr>
+        </p:nvSpPr>
+        <p:spPr/>
+        <p:txBody>
+          <a:bodyPr/>
+          <a:lstStyle/>
+          <a:p>
+            <a:r>
+              <a:rPr sz="1800"/>
+              <a:t>De manera que cualquiera que comiere este pan o bebiere esta copa del Señor indignamente, será culpado del cuerpo y de la sangre del Señor. Por tanto, pruébese cada uno a sí mismo, y coma así del pan, y beba de la copa. Porque el que come y bebe indignamente, sin discernir el cuerpo del Señor, juicio come y bebe para sí.</a:t>
+            </a:r>
+          </a:p>
+        </p:txBody>
+      </p:sp>
+    </p:spTree>
+  </p:cSld>
+  <p:clrMapOvr>
+    <a:masterClrMapping/>
+  </p:clrMapOvr>
+</p:sld>
+</file>
+
 <file path=ppt/slides/slide11.xml><?xml version="1.0" encoding="utf-8"?>
 <p:sld xmlns:a="http://schemas.openxmlformats.org/drawingml/2006/main" xmlns:r="http://schemas.openxmlformats.org/officeDocument/2006/relationships" xmlns:p="http://schemas.openxmlformats.org/presentationml/2006/main">
   <p:cSld>

--- a/assets/readings-supper.pptx
+++ b/assets/readings-supper.pptx
@@ -109,6 +109,7 @@
     <p:sldId id="359" r:id="rId103"/>
     <p:sldId id="360" r:id="rId104"/>
     <p:sldId id="361" r:id="rId109"/>
+    <p:sldId id="362" r:id="rId110"/>
   </p:sldIdLst>
   <p:sldSz cx="12192000" cy="6858000"/>
   <p:notesSz cx="6858000" cy="9144000"/>
@@ -2161,6 +2162,132 @@
 </p:sld>
 </file>
 
+<file path=ppt/slides/slide105.xml><?xml version="1.0" encoding="utf-8"?>
+<p:sld xmlns:a="http://schemas.openxmlformats.org/drawingml/2006/main" xmlns:p="http://schemas.openxmlformats.org/presentationml/2006/main" xmlns:r="http://schemas.openxmlformats.org/officeDocument/2006/relationships">
+  <p:cSld>
+    <p:spTree>
+      <p:nvGrpSpPr>
+        <p:cNvPr id="1" name=""/>
+        <p:cNvGrpSpPr/>
+        <p:nvPr/>
+      </p:nvGrpSpPr>
+      <p:grpSpPr/>
+      <p:sp>
+        <p:nvSpPr>
+          <p:cNvPr id="4" name="Text Placeholder 3">
+            <a:extLst>
+              <a:ext uri="{FF2B5EF4-FFF2-40B4-BE49-F238E27FC236}">
+                <a16:creationId xmlns:a16="http://schemas.microsoft.com/office/drawing/2014/main" id="{DFD9D55F-EF00-CB99-E3DF-A541273F03E7}"/>
+              </a:ext>
+            </a:extLst>
+          </p:cNvPr>
+          <p:cNvSpPr>
+            <a:spLocks noGrp="1"/>
+          </p:cNvSpPr>
+          <p:nvPr>
+            <p:ph type="body" sz="quarter" idx="10"/>
+          </p:nvPr>
+        </p:nvSpPr>
+        <p:spPr/>
+        <p:txBody>
+          <a:bodyPr/>
+          <a:lstStyle/>
+          <a:p>
+            <a:r>
+              <a:t>Luke 23:27-31</a:t>
+            </a:r>
+          </a:p>
+        </p:txBody>
+      </p:sp>
+      <p:sp>
+        <p:nvSpPr>
+          <p:cNvPr id="5" name="Text Placeholder 4">
+            <a:extLst>
+              <a:ext uri="{FF2B5EF4-FFF2-40B4-BE49-F238E27FC236}">
+                <a16:creationId xmlns:a16="http://schemas.microsoft.com/office/drawing/2014/main" id="{183C6CE0-2BF5-9A80-AAF9-98602288B00B}"/>
+              </a:ext>
+            </a:extLst>
+          </p:cNvPr>
+          <p:cNvSpPr>
+            <a:spLocks noGrp="1"/>
+          </p:cNvSpPr>
+          <p:nvPr>
+            <p:ph type="body" sz="quarter" idx="11"/>
+          </p:nvPr>
+        </p:nvSpPr>
+        <p:spPr/>
+        <p:txBody>
+          <a:bodyPr/>
+          <a:lstStyle/>
+          <a:p>
+            <a:r>
+              <a:t>Lucas 23:27-31</a:t>
+            </a:r>
+          </a:p>
+        </p:txBody>
+      </p:sp>
+      <p:sp>
+        <p:nvSpPr>
+          <p:cNvPr id="6" name="Text Placeholder 5">
+            <a:extLst>
+              <a:ext uri="{FF2B5EF4-FFF2-40B4-BE49-F238E27FC236}">
+                <a16:creationId xmlns:a16="http://schemas.microsoft.com/office/drawing/2014/main" id="{E3687956-5B1E-E87A-C63F-2CF83852F74A}"/>
+              </a:ext>
+            </a:extLst>
+          </p:cNvPr>
+          <p:cNvSpPr>
+            <a:spLocks noGrp="1"/>
+          </p:cNvSpPr>
+          <p:nvPr>
+            <p:ph type="body" sz="quarter" idx="12"/>
+          </p:nvPr>
+        </p:nvSpPr>
+        <p:spPr/>
+        <p:txBody>
+          <a:bodyPr/>
+          <a:lstStyle/>
+          <a:p>
+            <a:r>
+              <a:t>And there followed Him a great multitude of the people, and of women who also mourned and lamented Him. But Jesus, turning to them, said, “Daughters of Jerusalem, do not weep for Me, but weep for yourselves and for your children. For indeed the days are coming in which they will say, ‘Blessed are the barren, wombs that never bore, and breasts which never nursed!’ Then they will begin ‘to say to the mountains, “Fall on us!” and to the hills, “Cover us!”’ For if they do these things in the green wood, what will be done in the dry?”</a:t>
+            </a:r>
+          </a:p>
+        </p:txBody>
+      </p:sp>
+      <p:sp>
+        <p:nvSpPr>
+          <p:cNvPr id="7" name="Text Placeholder 6">
+            <a:extLst>
+              <a:ext uri="{FF2B5EF4-FFF2-40B4-BE49-F238E27FC236}">
+                <a16:creationId xmlns:a16="http://schemas.microsoft.com/office/drawing/2014/main" id="{939E2508-EFDC-0849-203A-1E6D24D54960}"/>
+              </a:ext>
+            </a:extLst>
+          </p:cNvPr>
+          <p:cNvSpPr>
+            <a:spLocks noGrp="1"/>
+          </p:cNvSpPr>
+          <p:nvPr>
+            <p:ph type="body" sz="quarter" idx="13"/>
+          </p:nvPr>
+        </p:nvSpPr>
+        <p:spPr/>
+        <p:txBody>
+          <a:bodyPr/>
+          <a:lstStyle/>
+          <a:p>
+            <a:r>
+              <a:t>Y le seguía gran multitud del pueblo, y de mujeres que lloraban y hacían lamentación por él. Pero Jesús, vuelto hacia ellas, les dijo: Hijas de Jerusalén, no lloréis por mí, sino llorad por vosotras mismas y por vuestros hijos. Porque he aquí vendrán días en que dirán: Bienaventuradas las estériles, y los vientres que no concibieron, y los pechos que no criaron. Entonces comenzarán a decir a los montes: Caed sobre nosotros; y a los collados: Cubridnos. Porque si en el árbol verde hacen estas cosas, ¿en el seco, qué no se hará?</a:t>
+            </a:r>
+          </a:p>
+        </p:txBody>
+      </p:sp>
+    </p:spTree>
+  </p:cSld>
+  <p:clrMapOvr>
+    <a:masterClrMapping/>
+  </p:clrMapOvr>
+</p:sld>
+</file>
+
 <file path=ppt/slides/slide11.xml><?xml version="1.0" encoding="utf-8"?>
 <p:sld xmlns:a="http://schemas.openxmlformats.org/drawingml/2006/main" xmlns:r="http://schemas.openxmlformats.org/officeDocument/2006/relationships" xmlns:p="http://schemas.openxmlformats.org/presentationml/2006/main">
   <p:cSld>
